--- a/docs/deck.pptx
+++ b/docs/deck.pptx
@@ -1303,7 +1303,7 @@
           <a:p>
             <a:r>
               <a:rPr lang="en-US" dirty="0"/>
-              <a:t>On execution: forty-one automated tests, CI running the full agentic scenario on every push, and a one-command live deploy to Arc. We optimized for quality over surface area — every feature you saw is tested and runs end to end.</a:t>
+              <a:t>On execution: fifty-six automated tests, CI running the full agentic scenario on every push, and a one-command live deploy to Arc. We optimized for quality over surface area — every feature you saw is tested and runs end to end.</a:t>
             </a:r>
             <a:endParaRPr lang="en-US" dirty="0"/>
           </a:p>
@@ -8668,7 +8668,7 @@
                 <a:ea typeface="Arial" pitchFamily="34" charset="-122"/>
                 <a:cs typeface="Arial" pitchFamily="34" charset="-120"/>
               </a:rPr>
-              <a:t>41</a:t>
+              <a:t>56</a:t>
             </a:r>
             <a:endParaRPr lang="en-US" sz="5200" dirty="0"/>
           </a:p>
@@ -8730,7 +8730,7 @@
                 <a:ea typeface="Arial" pitchFamily="34" charset="-122"/>
                 <a:cs typeface="Arial" pitchFamily="34" charset="-120"/>
               </a:rPr>
-              <a:t>(21 contract · 20 agent)</a:t>
+              <a:t>(21 contract · 35 agent)</a:t>
             </a:r>
             <a:endParaRPr lang="en-US" sz="1250" dirty="0"/>
           </a:p>

--- a/docs/deck.pptx
+++ b/docs/deck.pptx
@@ -1303,7 +1303,7 @@
           <a:p>
             <a:r>
               <a:rPr lang="en-US" dirty="0"/>
-              <a:t>On execution: fifty-six automated tests, CI running the full agentic scenario on every push, and a one-command live deploy to Arc. We optimized for quality over surface area — every feature you saw is tested and runs end to end.</a:t>
+              <a:t>On execution: sixty-four automated tests, CI running the full agentic scenario on every push, and a one-command live deploy to Arc. We optimized for quality over surface area — every feature you saw is tested and runs end to end.</a:t>
             </a:r>
             <a:endParaRPr lang="en-US" dirty="0"/>
           </a:p>
@@ -8668,7 +8668,7 @@
                 <a:ea typeface="Arial" pitchFamily="34" charset="-122"/>
                 <a:cs typeface="Arial" pitchFamily="34" charset="-120"/>
               </a:rPr>
-              <a:t>56</a:t>
+              <a:t>64</a:t>
             </a:r>
             <a:endParaRPr lang="en-US" sz="5200" dirty="0"/>
           </a:p>
@@ -8730,7 +8730,7 @@
                 <a:ea typeface="Arial" pitchFamily="34" charset="-122"/>
                 <a:cs typeface="Arial" pitchFamily="34" charset="-120"/>
               </a:rPr>
-              <a:t>(21 contract · 35 agent)</a:t>
+              <a:t>(21 contract · 43 agent)</a:t>
             </a:r>
             <a:endParaRPr lang="en-US" sz="1250" dirty="0"/>
           </a:p>

--- a/docs/deck.pptx
+++ b/docs/deck.pptx
@@ -5530,7 +5530,7 @@
                 <a:ea typeface="Consolas" pitchFamily="34" charset="-122"/>
                 <a:cs typeface="Consolas" pitchFamily="34" charset="-120"/>
               </a:rPr>
-              <a:t>LIVE DEMO · ONE AUTONOMOUS RUN</a:t>
+              <a:t>LIVE RUN · ONE AUTONOMOUS RUN</a:t>
             </a:r>
             <a:endParaRPr lang="en-US" sz="1250" dirty="0"/>
           </a:p>
@@ -6800,7 +6800,7 @@
                 <a:ea typeface="Consolas" pitchFamily="34" charset="-122"/>
                 <a:cs typeface="Consolas" pitchFamily="34" charset="-120"/>
               </a:rPr>
-              <a:t>LIVE DEMO</a:t>
+              <a:t>LIVE RUN</a:t>
             </a:r>
             <a:endParaRPr lang="en-US" sz="1050" dirty="0"/>
           </a:p>

--- a/docs/deck.pptx
+++ b/docs/deck.pptx
@@ -24,47 +24,451 @@
   </p:sldIdLst>
   <p:sldSz cx="12192000" cy="6858000"/>
   <p:notesSz cx="6858000" cy="9144000"/>
+  <p:defaultTextStyle>
+    <a:defPPr>
+      <a:defRPr lang="en-US"/>
+    </a:defPPr>
+    <a:lvl1pPr marL="0" algn="l" defTabSz="914400" rtl="0" eaLnBrk="1" latinLnBrk="0" hangingPunct="1">
+      <a:defRPr sz="1800" kern="1200">
+        <a:solidFill>
+          <a:schemeClr val="tx1"/>
+        </a:solidFill>
+        <a:latin typeface="+mn-lt"/>
+        <a:ea typeface="+mn-ea"/>
+        <a:cs typeface="+mn-cs"/>
+      </a:defRPr>
+    </a:lvl1pPr>
+    <a:lvl2pPr marL="457200" algn="l" defTabSz="914400" rtl="0" eaLnBrk="1" latinLnBrk="0" hangingPunct="1">
+      <a:defRPr sz="1800" kern="1200">
+        <a:solidFill>
+          <a:schemeClr val="tx1"/>
+        </a:solidFill>
+        <a:latin typeface="+mn-lt"/>
+        <a:ea typeface="+mn-ea"/>
+        <a:cs typeface="+mn-cs"/>
+      </a:defRPr>
+    </a:lvl2pPr>
+    <a:lvl3pPr marL="914400" algn="l" defTabSz="914400" rtl="0" eaLnBrk="1" latinLnBrk="0" hangingPunct="1">
+      <a:defRPr sz="1800" kern="1200">
+        <a:solidFill>
+          <a:schemeClr val="tx1"/>
+        </a:solidFill>
+        <a:latin typeface="+mn-lt"/>
+        <a:ea typeface="+mn-ea"/>
+        <a:cs typeface="+mn-cs"/>
+      </a:defRPr>
+    </a:lvl3pPr>
+    <a:lvl4pPr marL="1371600" algn="l" defTabSz="914400" rtl="0" eaLnBrk="1" latinLnBrk="0" hangingPunct="1">
+      <a:defRPr sz="1800" kern="1200">
+        <a:solidFill>
+          <a:schemeClr val="tx1"/>
+        </a:solidFill>
+        <a:latin typeface="+mn-lt"/>
+        <a:ea typeface="+mn-ea"/>
+        <a:cs typeface="+mn-cs"/>
+      </a:defRPr>
+    </a:lvl4pPr>
+    <a:lvl5pPr marL="1828800" algn="l" defTabSz="914400" rtl="0" eaLnBrk="1" latinLnBrk="0" hangingPunct="1">
+      <a:defRPr sz="1800" kern="1200">
+        <a:solidFill>
+          <a:schemeClr val="tx1"/>
+        </a:solidFill>
+        <a:latin typeface="+mn-lt"/>
+        <a:ea typeface="+mn-ea"/>
+        <a:cs typeface="+mn-cs"/>
+      </a:defRPr>
+    </a:lvl5pPr>
+    <a:lvl6pPr marL="2286000" algn="l" defTabSz="914400" rtl="0" eaLnBrk="1" latinLnBrk="0" hangingPunct="1">
+      <a:defRPr sz="1800" kern="1200">
+        <a:solidFill>
+          <a:schemeClr val="tx1"/>
+        </a:solidFill>
+        <a:latin typeface="+mn-lt"/>
+        <a:ea typeface="+mn-ea"/>
+        <a:cs typeface="+mn-cs"/>
+      </a:defRPr>
+    </a:lvl6pPr>
+    <a:lvl7pPr marL="2743200" algn="l" defTabSz="914400" rtl="0" eaLnBrk="1" latinLnBrk="0" hangingPunct="1">
+      <a:defRPr sz="1800" kern="1200">
+        <a:solidFill>
+          <a:schemeClr val="tx1"/>
+        </a:solidFill>
+        <a:latin typeface="+mn-lt"/>
+        <a:ea typeface="+mn-ea"/>
+        <a:cs typeface="+mn-cs"/>
+      </a:defRPr>
+    </a:lvl7pPr>
+    <a:lvl8pPr marL="3200400" algn="l" defTabSz="914400" rtl="0" eaLnBrk="1" latinLnBrk="0" hangingPunct="1">
+      <a:defRPr sz="1800" kern="1200">
+        <a:solidFill>
+          <a:schemeClr val="tx1"/>
+        </a:solidFill>
+        <a:latin typeface="+mn-lt"/>
+        <a:ea typeface="+mn-ea"/>
+        <a:cs typeface="+mn-cs"/>
+      </a:defRPr>
+    </a:lvl8pPr>
+    <a:lvl9pPr marL="3657600" algn="l" defTabSz="914400" rtl="0" eaLnBrk="1" latinLnBrk="0" hangingPunct="1">
+      <a:defRPr sz="1800" kern="1200">
+        <a:solidFill>
+          <a:schemeClr val="tx1"/>
+        </a:solidFill>
+        <a:latin typeface="+mn-lt"/>
+        <a:ea typeface="+mn-ea"/>
+        <a:cs typeface="+mn-cs"/>
+      </a:defRPr>
+    </a:lvl9pPr>
+  </p:defaultTextStyle>
 </p:presentation>
 </file>
 
 <file path=ppt/notesMasters/notesMaster1.xml><?xml version="1.0" encoding="utf-8"?>
-<p:notesMaster xmlns:a="http://schemas.openxmlformats.org/drawingml/2006/main" xmlns:r="http://schemas.openxmlformats.org/officeDocument/2006/relationships" xmlns:p="http://schemas.openxmlformats.org/presentationml/2006/main">
+<p:notesMaster xmlns:a="http://schemas.openxmlformats.org/drawingml/2006/main" xmlns:p="http://schemas.openxmlformats.org/presentationml/2006/main" xmlns:r="http://schemas.openxmlformats.org/officeDocument/2006/relationships">
   <p:cSld>
+    <p:bg>
+      <p:bgRef idx="1001">
+        <a:schemeClr val="bg1"/>
+      </p:bgRef>
+    </p:bg>
     <p:spTree>
       <p:nvGrpSpPr>
         <p:cNvPr id="1" name=""/>
         <p:cNvGrpSpPr/>
         <p:nvPr/>
       </p:nvGrpSpPr>
-      <p:grpSpPr/>
-      <p:sp>
-        <p:nvSpPr>
-          <p:cNvPr id="2" name="Notes Placeholder"/>
+      <p:grpSpPr>
+        <a:xfrm>
+          <a:off x="0" y="0"/>
+          <a:ext cx="0" cy="0"/>
+          <a:chOff x="0" y="0"/>
+          <a:chExt cx="0" cy="0"/>
+        </a:xfrm>
+      </p:grpSpPr>
+      <p:sp>
+        <p:nvSpPr>
+          <p:cNvPr id="2" name="Header Placeholder 1"/>
           <p:cNvSpPr>
             <a:spLocks noGrp="1"/>
           </p:cNvSpPr>
           <p:nvPr>
-            <p:ph type="body" idx="1"/>
+            <p:ph type="hdr" sz="quarter"/>
           </p:nvPr>
         </p:nvSpPr>
         <p:spPr>
           <a:xfrm>
-            <a:off x="685800" y="685800"/>
-            <a:ext cx="5486400" cy="6172200"/>
-          </a:xfrm>
-          <a:prstGeom prst="rect">
-            <a:avLst/>
-          </a:prstGeom>
-        </p:spPr>
-        <p:txBody>
-          <a:bodyPr/>
-          <a:lstStyle/>
-          <a:p/>
+            <a:off x="0" y="0"/>
+            <a:ext cx="2971800" cy="457200"/>
+          </a:xfrm>
+          <a:prstGeom prst="rect">
+            <a:avLst/>
+          </a:prstGeom>
+        </p:spPr>
+        <p:txBody>
+          <a:bodyPr vert="horz" lIns="91440" tIns="45720" rIns="91440" bIns="45720" rtlCol="0"/>
+          <a:lstStyle>
+            <a:lvl1pPr algn="l">
+              <a:defRPr sz="1200"/>
+            </a:lvl1pPr>
+          </a:lstStyle>
+          <a:p>
+            <a:endParaRPr lang="en-US"/>
+          </a:p>
+        </p:txBody>
+      </p:sp>
+      <p:sp>
+        <p:nvSpPr>
+          <p:cNvPr id="3" name="Date Placeholder 2"/>
+          <p:cNvSpPr>
+            <a:spLocks noGrp="1"/>
+          </p:cNvSpPr>
+          <p:nvPr>
+            <p:ph type="dt" idx="1"/>
+          </p:nvPr>
+        </p:nvSpPr>
+        <p:spPr>
+          <a:xfrm>
+            <a:off x="3884613" y="0"/>
+            <a:ext cx="2971800" cy="457200"/>
+          </a:xfrm>
+          <a:prstGeom prst="rect">
+            <a:avLst/>
+          </a:prstGeom>
+        </p:spPr>
+        <p:txBody>
+          <a:bodyPr vert="horz" lIns="91440" tIns="45720" rIns="91440" bIns="45720" rtlCol="0"/>
+          <a:lstStyle>
+            <a:lvl1pPr algn="r">
+              <a:defRPr sz="1200"/>
+            </a:lvl1pPr>
+          </a:lstStyle>
+          <a:p>
+            <a:fld id="{0F89C1C7-3DCD-1040-A9CF-14679D8B5DDD}" type="datetimeFigureOut">
+              <a:rPr lang="en-US" smtClean="0"/>
+              <a:t>10/17/16</a:t>
+            </a:fld>
+            <a:endParaRPr lang="en-US"/>
+          </a:p>
+        </p:txBody>
+      </p:sp>
+      <p:sp>
+        <p:nvSpPr>
+          <p:cNvPr id="4" name="Slide Image Placeholder 3"/>
+          <p:cNvSpPr>
+            <a:spLocks noGrp="1" noRot="1" noChangeAspect="1"/>
+          </p:cNvSpPr>
+          <p:nvPr>
+            <p:ph type="sldImg" idx="2"/>
+          </p:nvPr>
+        </p:nvSpPr>
+        <p:spPr>
+          <a:xfrm>
+            <a:off x="1143000" y="685800"/>
+            <a:ext cx="4572000" cy="3429000"/>
+          </a:xfrm>
+          <a:prstGeom prst="rect">
+            <a:avLst/>
+          </a:prstGeom>
+          <a:noFill/>
+          <a:ln w="12700">
+            <a:solidFill>
+              <a:prstClr val="black"/>
+            </a:solidFill>
+          </a:ln>
+        </p:spPr>
+        <p:txBody>
+          <a:bodyPr vert="horz" lIns="91440" tIns="45720" rIns="91440" bIns="45720" rtlCol="0" anchor="ctr"/>
+          <a:lstStyle/>
+          <a:p>
+            <a:endParaRPr lang="en-US"/>
+          </a:p>
+        </p:txBody>
+      </p:sp>
+      <p:sp>
+        <p:nvSpPr>
+          <p:cNvPr id="5" name="Notes Placeholder 4"/>
+          <p:cNvSpPr>
+            <a:spLocks noGrp="1"/>
+          </p:cNvSpPr>
+          <p:nvPr>
+            <p:ph type="body" sz="quarter" idx="3"/>
+          </p:nvPr>
+        </p:nvSpPr>
+        <p:spPr>
+          <a:xfrm>
+            <a:off x="685800" y="4343400"/>
+            <a:ext cx="5486400" cy="4114800"/>
+          </a:xfrm>
+          <a:prstGeom prst="rect">
+            <a:avLst/>
+          </a:prstGeom>
+        </p:spPr>
+        <p:txBody>
+          <a:bodyPr vert="horz" lIns="91440" tIns="45720" rIns="91440" bIns="45720" rtlCol="0"/>
+          <a:lstStyle/>
+          <a:p>
+            <a:pPr lvl="0"/>
+            <a:r>
+              <a:rPr lang="en-US" smtClean="0"/>
+              <a:t>Click to edit Master text styles</a:t>
+            </a:r>
+          </a:p>
+          <a:p>
+            <a:pPr lvl="1"/>
+            <a:r>
+              <a:rPr lang="en-US" smtClean="0"/>
+              <a:t>Second level</a:t>
+            </a:r>
+          </a:p>
+          <a:p>
+            <a:pPr lvl="2"/>
+            <a:r>
+              <a:rPr lang="en-US" smtClean="0"/>
+              <a:t>Third level</a:t>
+            </a:r>
+          </a:p>
+          <a:p>
+            <a:pPr lvl="3"/>
+            <a:r>
+              <a:rPr lang="en-US" smtClean="0"/>
+              <a:t>Fourth level</a:t>
+            </a:r>
+          </a:p>
+          <a:p>
+            <a:pPr lvl="4"/>
+            <a:r>
+              <a:rPr lang="en-US" smtClean="0"/>
+              <a:t>Fifth level</a:t>
+            </a:r>
+            <a:endParaRPr lang="en-US"/>
+          </a:p>
+        </p:txBody>
+      </p:sp>
+      <p:sp>
+        <p:nvSpPr>
+          <p:cNvPr id="6" name="Footer Placeholder 5"/>
+          <p:cNvSpPr>
+            <a:spLocks noGrp="1"/>
+          </p:cNvSpPr>
+          <p:nvPr>
+            <p:ph type="ftr" sz="quarter" idx="4"/>
+          </p:nvPr>
+        </p:nvSpPr>
+        <p:spPr>
+          <a:xfrm>
+            <a:off x="0" y="8685213"/>
+            <a:ext cx="2971800" cy="457200"/>
+          </a:xfrm>
+          <a:prstGeom prst="rect">
+            <a:avLst/>
+          </a:prstGeom>
+        </p:spPr>
+        <p:txBody>
+          <a:bodyPr vert="horz" lIns="91440" tIns="45720" rIns="91440" bIns="45720" rtlCol="0" anchor="b"/>
+          <a:lstStyle>
+            <a:lvl1pPr algn="l">
+              <a:defRPr sz="1200"/>
+            </a:lvl1pPr>
+          </a:lstStyle>
+          <a:p>
+            <a:endParaRPr lang="en-US"/>
+          </a:p>
+        </p:txBody>
+      </p:sp>
+      <p:sp>
+        <p:nvSpPr>
+          <p:cNvPr id="7" name="Slide Number Placeholder 6"/>
+          <p:cNvSpPr>
+            <a:spLocks noGrp="1"/>
+          </p:cNvSpPr>
+          <p:nvPr>
+            <p:ph type="sldNum" sz="quarter" idx="5"/>
+          </p:nvPr>
+        </p:nvSpPr>
+        <p:spPr>
+          <a:xfrm>
+            <a:off x="3884613" y="8685213"/>
+            <a:ext cx="2971800" cy="457200"/>
+          </a:xfrm>
+          <a:prstGeom prst="rect">
+            <a:avLst/>
+          </a:prstGeom>
+        </p:spPr>
+        <p:txBody>
+          <a:bodyPr vert="horz" lIns="91440" tIns="45720" rIns="91440" bIns="45720" rtlCol="0" anchor="b"/>
+          <a:lstStyle>
+            <a:lvl1pPr algn="r">
+              <a:defRPr sz="1200"/>
+            </a:lvl1pPr>
+          </a:lstStyle>
+          <a:p>
+            <a:fld id="{BB5E49A5-4136-284D-997B-48E1D791AD67}" type="slidenum">
+              <a:rPr lang="en-US" smtClean="0"/>
+              <a:t>‹#›</a:t>
+            </a:fld>
+            <a:endParaRPr lang="en-US"/>
+          </a:p>
         </p:txBody>
       </p:sp>
     </p:spTree>
+    <p:extLst>
+      <p:ext uri="{BB962C8B-B14F-4D97-AF65-F5344CB8AC3E}">
+        <p14:creationId xmlns:p14="http://schemas.microsoft.com/office/powerpoint/2010/main" val="2623252185"/>
+      </p:ext>
+    </p:extLst>
   </p:cSld>
   <p:clrMap bg1="lt1" tx1="dk1" bg2="lt2" tx2="dk2" accent1="accent1" accent2="accent2" accent3="accent3" accent4="accent4" accent5="accent5" accent6="accent6" hlink="hlink" folHlink="folHlink"/>
+  <p:notesStyle>
+    <a:lvl1pPr marL="0" algn="l" defTabSz="457200" rtl="0" eaLnBrk="1" latinLnBrk="0" hangingPunct="1">
+      <a:defRPr sz="1200" kern="1200">
+        <a:solidFill>
+          <a:schemeClr val="tx1"/>
+        </a:solidFill>
+        <a:latin typeface="+mn-lt"/>
+        <a:ea typeface="+mn-ea"/>
+        <a:cs typeface="+mn-cs"/>
+      </a:defRPr>
+    </a:lvl1pPr>
+    <a:lvl2pPr marL="457200" algn="l" defTabSz="457200" rtl="0" eaLnBrk="1" latinLnBrk="0" hangingPunct="1">
+      <a:defRPr sz="1200" kern="1200">
+        <a:solidFill>
+          <a:schemeClr val="tx1"/>
+        </a:solidFill>
+        <a:latin typeface="+mn-lt"/>
+        <a:ea typeface="+mn-ea"/>
+        <a:cs typeface="+mn-cs"/>
+      </a:defRPr>
+    </a:lvl2pPr>
+    <a:lvl3pPr marL="914400" algn="l" defTabSz="457200" rtl="0" eaLnBrk="1" latinLnBrk="0" hangingPunct="1">
+      <a:defRPr sz="1200" kern="1200">
+        <a:solidFill>
+          <a:schemeClr val="tx1"/>
+        </a:solidFill>
+        <a:latin typeface="+mn-lt"/>
+        <a:ea typeface="+mn-ea"/>
+        <a:cs typeface="+mn-cs"/>
+      </a:defRPr>
+    </a:lvl3pPr>
+    <a:lvl4pPr marL="1371600" algn="l" defTabSz="457200" rtl="0" eaLnBrk="1" latinLnBrk="0" hangingPunct="1">
+      <a:defRPr sz="1200" kern="1200">
+        <a:solidFill>
+          <a:schemeClr val="tx1"/>
+        </a:solidFill>
+        <a:latin typeface="+mn-lt"/>
+        <a:ea typeface="+mn-ea"/>
+        <a:cs typeface="+mn-cs"/>
+      </a:defRPr>
+    </a:lvl4pPr>
+    <a:lvl5pPr marL="1828800" algn="l" defTabSz="457200" rtl="0" eaLnBrk="1" latinLnBrk="0" hangingPunct="1">
+      <a:defRPr sz="1200" kern="1200">
+        <a:solidFill>
+          <a:schemeClr val="tx1"/>
+        </a:solidFill>
+        <a:latin typeface="+mn-lt"/>
+        <a:ea typeface="+mn-ea"/>
+        <a:cs typeface="+mn-cs"/>
+      </a:defRPr>
+    </a:lvl5pPr>
+    <a:lvl6pPr marL="2286000" algn="l" defTabSz="457200" rtl="0" eaLnBrk="1" latinLnBrk="0" hangingPunct="1">
+      <a:defRPr sz="1200" kern="1200">
+        <a:solidFill>
+          <a:schemeClr val="tx1"/>
+        </a:solidFill>
+        <a:latin typeface="+mn-lt"/>
+        <a:ea typeface="+mn-ea"/>
+        <a:cs typeface="+mn-cs"/>
+      </a:defRPr>
+    </a:lvl6pPr>
+    <a:lvl7pPr marL="2743200" algn="l" defTabSz="457200" rtl="0" eaLnBrk="1" latinLnBrk="0" hangingPunct="1">
+      <a:defRPr sz="1200" kern="1200">
+        <a:solidFill>
+          <a:schemeClr val="tx1"/>
+        </a:solidFill>
+        <a:latin typeface="+mn-lt"/>
+        <a:ea typeface="+mn-ea"/>
+        <a:cs typeface="+mn-cs"/>
+      </a:defRPr>
+    </a:lvl7pPr>
+    <a:lvl8pPr marL="3200400" algn="l" defTabSz="457200" rtl="0" eaLnBrk="1" latinLnBrk="0" hangingPunct="1">
+      <a:defRPr sz="1200" kern="1200">
+        <a:solidFill>
+          <a:schemeClr val="tx1"/>
+        </a:solidFill>
+        <a:latin typeface="+mn-lt"/>
+        <a:ea typeface="+mn-ea"/>
+        <a:cs typeface="+mn-cs"/>
+      </a:defRPr>
+    </a:lvl8pPr>
+    <a:lvl9pPr marL="3657600" algn="l" defTabSz="457200" rtl="0" eaLnBrk="1" latinLnBrk="0" hangingPunct="1">
+      <a:defRPr sz="1200" kern="1200">
+        <a:solidFill>
+          <a:schemeClr val="tx1"/>
+        </a:solidFill>
+        <a:latin typeface="+mn-lt"/>
+        <a:ea typeface="+mn-ea"/>
+        <a:cs typeface="+mn-cs"/>
+      </a:defRPr>
+    </a:lvl9pPr>
+  </p:notesStyle>
 </p:notesMaster>
 </file>
 
@@ -605,7 +1009,77 @@
           <a:chExt cx="0" cy="0"/>
         </a:xfrm>
       </p:grpSpPr>
+      <p:sp>
+        <p:nvSpPr>
+          <p:cNvPr id="2" name="Date Placeholder 1"/>
+          <p:cNvSpPr>
+            <a:spLocks noGrp="1"/>
+          </p:cNvSpPr>
+          <p:nvPr>
+            <p:ph type="dt" sz="half" idx="10"/>
+          </p:nvPr>
+        </p:nvSpPr>
+        <p:spPr/>
+        <p:txBody>
+          <a:bodyPr/>
+          <a:lstStyle/>
+          <a:p>
+            <a:fld id="{5BCAD085-E8A6-8845-BD4E-CB4CCA059FC4}" type="datetimeFigureOut">
+              <a:rPr lang="en-US" smtClean="0"/>
+              <a:t>1/27/13</a:t>
+            </a:fld>
+            <a:endParaRPr lang="en-US"/>
+          </a:p>
+        </p:txBody>
+      </p:sp>
+      <p:sp>
+        <p:nvSpPr>
+          <p:cNvPr id="3" name="Footer Placeholder 2"/>
+          <p:cNvSpPr>
+            <a:spLocks noGrp="1"/>
+          </p:cNvSpPr>
+          <p:nvPr>
+            <p:ph type="ftr" sz="quarter" idx="11"/>
+          </p:nvPr>
+        </p:nvSpPr>
+        <p:spPr/>
+        <p:txBody>
+          <a:bodyPr/>
+          <a:lstStyle/>
+          <a:p>
+            <a:endParaRPr lang="en-US"/>
+          </a:p>
+        </p:txBody>
+      </p:sp>
+      <p:sp>
+        <p:nvSpPr>
+          <p:cNvPr id="4" name="Slide Number Placeholder 3"/>
+          <p:cNvSpPr>
+            <a:spLocks noGrp="1"/>
+          </p:cNvSpPr>
+          <p:nvPr>
+            <p:ph type="sldNum" sz="quarter" idx="12"/>
+          </p:nvPr>
+        </p:nvSpPr>
+        <p:spPr/>
+        <p:txBody>
+          <a:bodyPr/>
+          <a:lstStyle/>
+          <a:p>
+            <a:fld id="{C1FF6DA9-008F-8B48-92A6-B652298478BF}" type="slidenum">
+              <a:rPr lang="en-US" smtClean="0"/>
+              <a:t>‹#›</a:t>
+            </a:fld>
+            <a:endParaRPr lang="en-US"/>
+          </a:p>
+        </p:txBody>
+      </p:sp>
     </p:spTree>
+    <p:extLst>
+      <p:ext uri="{BB962C8B-B14F-4D97-AF65-F5344CB8AC3E}">
+        <p14:creationId xmlns:p14="http://schemas.microsoft.com/office/powerpoint/2010/main" val="1212999818"/>
+      </p:ext>
+    </p:extLst>
   </p:cSld>
   <p:clrMapOvr>
     <a:masterClrMapping/>
@@ -638,12 +1112,481 @@
           <a:chExt cx="0" cy="0"/>
         </a:xfrm>
       </p:grpSpPr>
+      <p:sp>
+        <p:nvSpPr>
+          <p:cNvPr id="2" name="Title Placeholder 1"/>
+          <p:cNvSpPr>
+            <a:spLocks noGrp="1"/>
+          </p:cNvSpPr>
+          <p:nvPr>
+            <p:ph type="title"/>
+          </p:nvPr>
+        </p:nvSpPr>
+        <p:spPr>
+          <a:xfrm>
+            <a:off x="457200" y="274638"/>
+            <a:ext cx="8229600" cy="1143000"/>
+          </a:xfrm>
+          <a:prstGeom prst="rect">
+            <a:avLst/>
+          </a:prstGeom>
+        </p:spPr>
+        <p:txBody>
+          <a:bodyPr vert="horz" lIns="91440" tIns="45720" rIns="91440" bIns="45720" rtlCol="0" anchor="ctr">
+            <a:normAutofit/>
+          </a:bodyPr>
+          <a:lstStyle/>
+          <a:p>
+            <a:r>
+              <a:rPr lang="en-US" smtClean="0"/>
+              <a:t>Click to edit Master title style</a:t>
+            </a:r>
+            <a:endParaRPr lang="en-US"/>
+          </a:p>
+        </p:txBody>
+      </p:sp>
+      <p:sp>
+        <p:nvSpPr>
+          <p:cNvPr id="3" name="Text Placeholder 2"/>
+          <p:cNvSpPr>
+            <a:spLocks noGrp="1"/>
+          </p:cNvSpPr>
+          <p:nvPr>
+            <p:ph type="body" idx="1"/>
+          </p:nvPr>
+        </p:nvSpPr>
+        <p:spPr>
+          <a:xfrm>
+            <a:off x="457200" y="1600200"/>
+            <a:ext cx="8229600" cy="4525963"/>
+          </a:xfrm>
+          <a:prstGeom prst="rect">
+            <a:avLst/>
+          </a:prstGeom>
+        </p:spPr>
+        <p:txBody>
+          <a:bodyPr vert="horz" lIns="91440" tIns="45720" rIns="91440" bIns="45720" rtlCol="0">
+            <a:normAutofit/>
+          </a:bodyPr>
+          <a:lstStyle/>
+          <a:p>
+            <a:pPr lvl="0"/>
+            <a:r>
+              <a:rPr lang="en-US" smtClean="0"/>
+              <a:t>Click to edit Master text styles</a:t>
+            </a:r>
+          </a:p>
+          <a:p>
+            <a:pPr lvl="1"/>
+            <a:r>
+              <a:rPr lang="en-US" smtClean="0"/>
+              <a:t>Second level</a:t>
+            </a:r>
+          </a:p>
+          <a:p>
+            <a:pPr lvl="2"/>
+            <a:r>
+              <a:rPr lang="en-US" smtClean="0"/>
+              <a:t>Third level</a:t>
+            </a:r>
+          </a:p>
+          <a:p>
+            <a:pPr lvl="3"/>
+            <a:r>
+              <a:rPr lang="en-US" smtClean="0"/>
+              <a:t>Fourth level</a:t>
+            </a:r>
+          </a:p>
+          <a:p>
+            <a:pPr lvl="4"/>
+            <a:r>
+              <a:rPr lang="en-US" smtClean="0"/>
+              <a:t>Fifth level</a:t>
+            </a:r>
+            <a:endParaRPr lang="en-US"/>
+          </a:p>
+        </p:txBody>
+      </p:sp>
+      <p:sp>
+        <p:nvSpPr>
+          <p:cNvPr id="4" name="Date Placeholder 3"/>
+          <p:cNvSpPr>
+            <a:spLocks noGrp="1"/>
+          </p:cNvSpPr>
+          <p:nvPr>
+            <p:ph type="dt" sz="half" idx="2"/>
+          </p:nvPr>
+        </p:nvSpPr>
+        <p:spPr>
+          <a:xfrm>
+            <a:off x="457200" y="6356350"/>
+            <a:ext cx="2133600" cy="365125"/>
+          </a:xfrm>
+          <a:prstGeom prst="rect">
+            <a:avLst/>
+          </a:prstGeom>
+        </p:spPr>
+        <p:txBody>
+          <a:bodyPr vert="horz" lIns="91440" tIns="45720" rIns="91440" bIns="45720" rtlCol="0" anchor="ctr"/>
+          <a:lstStyle>
+            <a:lvl1pPr algn="l">
+              <a:defRPr sz="1200">
+                <a:solidFill>
+                  <a:schemeClr val="tx1">
+                    <a:tint val="75000"/>
+                  </a:schemeClr>
+                </a:solidFill>
+              </a:defRPr>
+            </a:lvl1pPr>
+          </a:lstStyle>
+          <a:p>
+            <a:fld id="{5BCAD085-E8A6-8845-BD4E-CB4CCA059FC4}" type="datetimeFigureOut">
+              <a:rPr lang="en-US" smtClean="0"/>
+              <a:t>1/27/13</a:t>
+            </a:fld>
+            <a:endParaRPr lang="en-US"/>
+          </a:p>
+        </p:txBody>
+      </p:sp>
+      <p:sp>
+        <p:nvSpPr>
+          <p:cNvPr id="5" name="Footer Placeholder 4"/>
+          <p:cNvSpPr>
+            <a:spLocks noGrp="1"/>
+          </p:cNvSpPr>
+          <p:nvPr>
+            <p:ph type="ftr" sz="quarter" idx="3"/>
+          </p:nvPr>
+        </p:nvSpPr>
+        <p:spPr>
+          <a:xfrm>
+            <a:off x="3124200" y="6356350"/>
+            <a:ext cx="2895600" cy="365125"/>
+          </a:xfrm>
+          <a:prstGeom prst="rect">
+            <a:avLst/>
+          </a:prstGeom>
+        </p:spPr>
+        <p:txBody>
+          <a:bodyPr vert="horz" lIns="91440" tIns="45720" rIns="91440" bIns="45720" rtlCol="0" anchor="ctr"/>
+          <a:lstStyle>
+            <a:lvl1pPr algn="ctr">
+              <a:defRPr sz="1200">
+                <a:solidFill>
+                  <a:schemeClr val="tx1">
+                    <a:tint val="75000"/>
+                  </a:schemeClr>
+                </a:solidFill>
+              </a:defRPr>
+            </a:lvl1pPr>
+          </a:lstStyle>
+          <a:p>
+            <a:endParaRPr lang="en-US"/>
+          </a:p>
+        </p:txBody>
+      </p:sp>
+      <p:sp>
+        <p:nvSpPr>
+          <p:cNvPr id="6" name="Slide Number Placeholder 5"/>
+          <p:cNvSpPr>
+            <a:spLocks noGrp="1"/>
+          </p:cNvSpPr>
+          <p:nvPr>
+            <p:ph type="sldNum" sz="quarter" idx="4"/>
+          </p:nvPr>
+        </p:nvSpPr>
+        <p:spPr>
+          <a:xfrm>
+            <a:off x="6553200" y="6356350"/>
+            <a:ext cx="2133600" cy="365125"/>
+          </a:xfrm>
+          <a:prstGeom prst="rect">
+            <a:avLst/>
+          </a:prstGeom>
+        </p:spPr>
+        <p:txBody>
+          <a:bodyPr vert="horz" lIns="91440" tIns="45720" rIns="91440" bIns="45720" rtlCol="0" anchor="ctr"/>
+          <a:lstStyle>
+            <a:lvl1pPr algn="r">
+              <a:defRPr sz="1200">
+                <a:solidFill>
+                  <a:schemeClr val="tx1">
+                    <a:tint val="75000"/>
+                  </a:schemeClr>
+                </a:solidFill>
+              </a:defRPr>
+            </a:lvl1pPr>
+          </a:lstStyle>
+          <a:p>
+            <a:fld id="{C1FF6DA9-008F-8B48-92A6-B652298478BF}" type="slidenum">
+              <a:rPr lang="en-US" smtClean="0"/>
+              <a:t>‹#›</a:t>
+            </a:fld>
+            <a:endParaRPr lang="en-US"/>
+          </a:p>
+        </p:txBody>
+      </p:sp>
     </p:spTree>
+    <p:extLst>
+      <p:ext uri="{BB962C8B-B14F-4D97-AF65-F5344CB8AC3E}">
+        <p14:creationId xmlns:p14="http://schemas.microsoft.com/office/powerpoint/2010/main" val="2209977519"/>
+      </p:ext>
+    </p:extLst>
   </p:cSld>
-  <p:clrMap bg1="dk1" tx1="lt1" bg2="dk2" tx2="lt2" accent1="accent1" accent2="accent2" accent3="accent3" accent4="accent4" accent5="accent5" accent6="accent6" hlink="hlink" folHlink="folHlink"/>
+  <p:clrMap bg1="lt1" tx1="dk1" bg2="lt2" tx2="dk2" accent1="accent1" accent2="accent2" accent3="accent3" accent4="accent4" accent5="accent5" accent6="accent6" hlink="hlink" folHlink="folHlink"/>
   <p:sldLayoutIdLst>
-    <p:sldLayoutId id="2147483649" r:id="rId1"/>
+    <p:sldLayoutId id="2147483655" r:id="rId1"/>
   </p:sldLayoutIdLst>
+  <p:txStyles>
+    <p:titleStyle>
+      <a:lvl1pPr algn="ctr" defTabSz="457200" rtl="0" eaLnBrk="1" latinLnBrk="0" hangingPunct="1">
+        <a:spcBef>
+          <a:spcPct val="0"/>
+        </a:spcBef>
+        <a:buNone/>
+        <a:defRPr sz="4400" kern="1200">
+          <a:solidFill>
+            <a:schemeClr val="tx1"/>
+          </a:solidFill>
+          <a:latin typeface="+mj-lt"/>
+          <a:ea typeface="+mj-ea"/>
+          <a:cs typeface="+mj-cs"/>
+        </a:defRPr>
+      </a:lvl1pPr>
+    </p:titleStyle>
+    <p:bodyStyle>
+      <a:lvl1pPr marL="342900" indent="-342900" algn="l" defTabSz="457200" rtl="0" eaLnBrk="1" latinLnBrk="0" hangingPunct="1">
+        <a:spcBef>
+          <a:spcPct val="20000"/>
+        </a:spcBef>
+        <a:buFont typeface="Arial"/>
+        <a:buChar char="•"/>
+        <a:defRPr sz="3200" kern="1200">
+          <a:solidFill>
+            <a:schemeClr val="tx1"/>
+          </a:solidFill>
+          <a:latin typeface="+mn-lt"/>
+          <a:ea typeface="+mn-ea"/>
+          <a:cs typeface="+mn-cs"/>
+        </a:defRPr>
+      </a:lvl1pPr>
+      <a:lvl2pPr marL="742950" indent="-285750" algn="l" defTabSz="457200" rtl="0" eaLnBrk="1" latinLnBrk="0" hangingPunct="1">
+        <a:spcBef>
+          <a:spcPct val="20000"/>
+        </a:spcBef>
+        <a:buFont typeface="Arial"/>
+        <a:buChar char="–"/>
+        <a:defRPr sz="2800" kern="1200">
+          <a:solidFill>
+            <a:schemeClr val="tx1"/>
+          </a:solidFill>
+          <a:latin typeface="+mn-lt"/>
+          <a:ea typeface="+mn-ea"/>
+          <a:cs typeface="+mn-cs"/>
+        </a:defRPr>
+      </a:lvl2pPr>
+      <a:lvl3pPr marL="1143000" indent="-228600" algn="l" defTabSz="457200" rtl="0" eaLnBrk="1" latinLnBrk="0" hangingPunct="1">
+        <a:spcBef>
+          <a:spcPct val="20000"/>
+        </a:spcBef>
+        <a:buFont typeface="Arial"/>
+        <a:buChar char="•"/>
+        <a:defRPr sz="2400" kern="1200">
+          <a:solidFill>
+            <a:schemeClr val="tx1"/>
+          </a:solidFill>
+          <a:latin typeface="+mn-lt"/>
+          <a:ea typeface="+mn-ea"/>
+          <a:cs typeface="+mn-cs"/>
+        </a:defRPr>
+      </a:lvl3pPr>
+      <a:lvl4pPr marL="1600200" indent="-228600" algn="l" defTabSz="457200" rtl="0" eaLnBrk="1" latinLnBrk="0" hangingPunct="1">
+        <a:spcBef>
+          <a:spcPct val="20000"/>
+        </a:spcBef>
+        <a:buFont typeface="Arial"/>
+        <a:buChar char="–"/>
+        <a:defRPr sz="2000" kern="1200">
+          <a:solidFill>
+            <a:schemeClr val="tx1"/>
+          </a:solidFill>
+          <a:latin typeface="+mn-lt"/>
+          <a:ea typeface="+mn-ea"/>
+          <a:cs typeface="+mn-cs"/>
+        </a:defRPr>
+      </a:lvl4pPr>
+      <a:lvl5pPr marL="2057400" indent="-228600" algn="l" defTabSz="457200" rtl="0" eaLnBrk="1" latinLnBrk="0" hangingPunct="1">
+        <a:spcBef>
+          <a:spcPct val="20000"/>
+        </a:spcBef>
+        <a:buFont typeface="Arial"/>
+        <a:buChar char="»"/>
+        <a:defRPr sz="2000" kern="1200">
+          <a:solidFill>
+            <a:schemeClr val="tx1"/>
+          </a:solidFill>
+          <a:latin typeface="+mn-lt"/>
+          <a:ea typeface="+mn-ea"/>
+          <a:cs typeface="+mn-cs"/>
+        </a:defRPr>
+      </a:lvl5pPr>
+      <a:lvl6pPr marL="2514600" indent="-228600" algn="l" defTabSz="457200" rtl="0" eaLnBrk="1" latinLnBrk="0" hangingPunct="1">
+        <a:spcBef>
+          <a:spcPct val="20000"/>
+        </a:spcBef>
+        <a:buFont typeface="Arial"/>
+        <a:buChar char="•"/>
+        <a:defRPr sz="2000" kern="1200">
+          <a:solidFill>
+            <a:schemeClr val="tx1"/>
+          </a:solidFill>
+          <a:latin typeface="+mn-lt"/>
+          <a:ea typeface="+mn-ea"/>
+          <a:cs typeface="+mn-cs"/>
+        </a:defRPr>
+      </a:lvl6pPr>
+      <a:lvl7pPr marL="2971800" indent="-228600" algn="l" defTabSz="457200" rtl="0" eaLnBrk="1" latinLnBrk="0" hangingPunct="1">
+        <a:spcBef>
+          <a:spcPct val="20000"/>
+        </a:spcBef>
+        <a:buFont typeface="Arial"/>
+        <a:buChar char="•"/>
+        <a:defRPr sz="2000" kern="1200">
+          <a:solidFill>
+            <a:schemeClr val="tx1"/>
+          </a:solidFill>
+          <a:latin typeface="+mn-lt"/>
+          <a:ea typeface="+mn-ea"/>
+          <a:cs typeface="+mn-cs"/>
+        </a:defRPr>
+      </a:lvl7pPr>
+      <a:lvl8pPr marL="3429000" indent="-228600" algn="l" defTabSz="457200" rtl="0" eaLnBrk="1" latinLnBrk="0" hangingPunct="1">
+        <a:spcBef>
+          <a:spcPct val="20000"/>
+        </a:spcBef>
+        <a:buFont typeface="Arial"/>
+        <a:buChar char="•"/>
+        <a:defRPr sz="2000" kern="1200">
+          <a:solidFill>
+            <a:schemeClr val="tx1"/>
+          </a:solidFill>
+          <a:latin typeface="+mn-lt"/>
+          <a:ea typeface="+mn-ea"/>
+          <a:cs typeface="+mn-cs"/>
+        </a:defRPr>
+      </a:lvl8pPr>
+      <a:lvl9pPr marL="3886200" indent="-228600" algn="l" defTabSz="457200" rtl="0" eaLnBrk="1" latinLnBrk="0" hangingPunct="1">
+        <a:spcBef>
+          <a:spcPct val="20000"/>
+        </a:spcBef>
+        <a:buFont typeface="Arial"/>
+        <a:buChar char="•"/>
+        <a:defRPr sz="2000" kern="1200">
+          <a:solidFill>
+            <a:schemeClr val="tx1"/>
+          </a:solidFill>
+          <a:latin typeface="+mn-lt"/>
+          <a:ea typeface="+mn-ea"/>
+          <a:cs typeface="+mn-cs"/>
+        </a:defRPr>
+      </a:lvl9pPr>
+    </p:bodyStyle>
+    <p:otherStyle>
+      <a:defPPr>
+        <a:defRPr lang="en-US"/>
+      </a:defPPr>
+      <a:lvl1pPr marL="0" algn="l" defTabSz="457200" rtl="0" eaLnBrk="1" latinLnBrk="0" hangingPunct="1">
+        <a:defRPr sz="1800" kern="1200">
+          <a:solidFill>
+            <a:schemeClr val="tx1"/>
+          </a:solidFill>
+          <a:latin typeface="+mn-lt"/>
+          <a:ea typeface="+mn-ea"/>
+          <a:cs typeface="+mn-cs"/>
+        </a:defRPr>
+      </a:lvl1pPr>
+      <a:lvl2pPr marL="457200" algn="l" defTabSz="457200" rtl="0" eaLnBrk="1" latinLnBrk="0" hangingPunct="1">
+        <a:defRPr sz="1800" kern="1200">
+          <a:solidFill>
+            <a:schemeClr val="tx1"/>
+          </a:solidFill>
+          <a:latin typeface="+mn-lt"/>
+          <a:ea typeface="+mn-ea"/>
+          <a:cs typeface="+mn-cs"/>
+        </a:defRPr>
+      </a:lvl2pPr>
+      <a:lvl3pPr marL="914400" algn="l" defTabSz="457200" rtl="0" eaLnBrk="1" latinLnBrk="0" hangingPunct="1">
+        <a:defRPr sz="1800" kern="1200">
+          <a:solidFill>
+            <a:schemeClr val="tx1"/>
+          </a:solidFill>
+          <a:latin typeface="+mn-lt"/>
+          <a:ea typeface="+mn-ea"/>
+          <a:cs typeface="+mn-cs"/>
+        </a:defRPr>
+      </a:lvl3pPr>
+      <a:lvl4pPr marL="1371600" algn="l" defTabSz="457200" rtl="0" eaLnBrk="1" latinLnBrk="0" hangingPunct="1">
+        <a:defRPr sz="1800" kern="1200">
+          <a:solidFill>
+            <a:schemeClr val="tx1"/>
+          </a:solidFill>
+          <a:latin typeface="+mn-lt"/>
+          <a:ea typeface="+mn-ea"/>
+          <a:cs typeface="+mn-cs"/>
+        </a:defRPr>
+      </a:lvl4pPr>
+      <a:lvl5pPr marL="1828800" algn="l" defTabSz="457200" rtl="0" eaLnBrk="1" latinLnBrk="0" hangingPunct="1">
+        <a:defRPr sz="1800" kern="1200">
+          <a:solidFill>
+            <a:schemeClr val="tx1"/>
+          </a:solidFill>
+          <a:latin typeface="+mn-lt"/>
+          <a:ea typeface="+mn-ea"/>
+          <a:cs typeface="+mn-cs"/>
+        </a:defRPr>
+      </a:lvl5pPr>
+      <a:lvl6pPr marL="2286000" algn="l" defTabSz="457200" rtl="0" eaLnBrk="1" latinLnBrk="0" hangingPunct="1">
+        <a:defRPr sz="1800" kern="1200">
+          <a:solidFill>
+            <a:schemeClr val="tx1"/>
+          </a:solidFill>
+          <a:latin typeface="+mn-lt"/>
+          <a:ea typeface="+mn-ea"/>
+          <a:cs typeface="+mn-cs"/>
+        </a:defRPr>
+      </a:lvl6pPr>
+      <a:lvl7pPr marL="2743200" algn="l" defTabSz="457200" rtl="0" eaLnBrk="1" latinLnBrk="0" hangingPunct="1">
+        <a:defRPr sz="1800" kern="1200">
+          <a:solidFill>
+            <a:schemeClr val="tx1"/>
+          </a:solidFill>
+          <a:latin typeface="+mn-lt"/>
+          <a:ea typeface="+mn-ea"/>
+          <a:cs typeface="+mn-cs"/>
+        </a:defRPr>
+      </a:lvl7pPr>
+      <a:lvl8pPr marL="3200400" algn="l" defTabSz="457200" rtl="0" eaLnBrk="1" latinLnBrk="0" hangingPunct="1">
+        <a:defRPr sz="1800" kern="1200">
+          <a:solidFill>
+            <a:schemeClr val="tx1"/>
+          </a:solidFill>
+          <a:latin typeface="+mn-lt"/>
+          <a:ea typeface="+mn-ea"/>
+          <a:cs typeface="+mn-cs"/>
+        </a:defRPr>
+      </a:lvl8pPr>
+      <a:lvl9pPr marL="3657600" algn="l" defTabSz="457200" rtl="0" eaLnBrk="1" latinLnBrk="0" hangingPunct="1">
+        <a:defRPr sz="1800" kern="1200">
+          <a:solidFill>
+            <a:schemeClr val="tx1"/>
+          </a:solidFill>
+          <a:latin typeface="+mn-lt"/>
+          <a:ea typeface="+mn-ea"/>
+          <a:cs typeface="+mn-cs"/>
+        </a:defRPr>
+      </a:lvl9pPr>
+    </p:otherStyle>
+  </p:txStyles>
 </p:sldMaster>
 </file>
 
@@ -9599,20 +10542,20 @@
 </file>
 
 <file path=ppt/theme/theme1.xml><?xml version="1.0" encoding="utf-8"?>
-<a:theme xmlns:a="http://schemas.openxmlformats.org/drawingml/2006/main" name="Tessera">
+<a:theme xmlns:a="http://schemas.openxmlformats.org/drawingml/2006/main" name="Office Theme">
   <a:themeElements>
-    <a:clrScheme name="Tessera">
+    <a:clrScheme name="Office">
       <a:dk1>
-        <a:srgbClr val="0B0F17"/>
+        <a:sysClr val="windowText" lastClr="000000"/>
       </a:dk1>
       <a:lt1>
-        <a:srgbClr val="E6EDF7"/>
+        <a:sysClr val="window" lastClr="FFFFFF"/>
       </a:lt1>
       <a:dk2>
-        <a:srgbClr val="121826"/>
+        <a:srgbClr val="1F497D"/>
       </a:dk2>
       <a:lt2>
-        <a:srgbClr val="F2F6FC"/>
+        <a:srgbClr val="EEECE1"/>
       </a:lt2>
       <a:accent1>
         <a:srgbClr val="2F6BE0"/>
@@ -9621,88 +10564,619 @@
         <a:srgbClr val="38BDF8"/>
       </a:accent2>
       <a:accent3>
-        <a:srgbClr val="34D399"/>
+        <a:srgbClr val="9BBB59"/>
       </a:accent3>
       <a:accent4>
-        <a:srgbClr val="FBBF24"/>
+        <a:srgbClr val="8064A2"/>
       </a:accent4>
       <a:accent5>
-        <a:srgbClr val="F87171"/>
+        <a:srgbClr val="4BACC6"/>
       </a:accent5>
       <a:accent6>
-        <a:srgbClr val="A78BFA"/>
+        <a:srgbClr val="F79646"/>
       </a:accent6>
       <a:hlink>
-        <a:srgbClr val="38BDF8"/>
+        <a:srgbClr val="0000FF"/>
       </a:hlink>
       <a:folHlink>
-        <a:srgbClr val="93A4BF"/>
+        <a:srgbClr val="800080"/>
       </a:folHlink>
     </a:clrScheme>
-    <a:fontScheme name="Tessera">
+    <a:fontScheme name="Office">
       <a:majorFont>
-        <a:latin typeface="Segoe UI"/>
+        <a:latin typeface="Calibri"/>
         <a:ea typeface=""/>
         <a:cs typeface=""/>
+        <a:font script="Jpan" typeface="ＭＳ Ｐゴシック"/>
+        <a:font script="Hang" typeface="맑은 고딕"/>
+        <a:font script="Hans" typeface="宋体"/>
+        <a:font script="Hant" typeface="新細明體"/>
+        <a:font script="Arab" typeface="Times New Roman"/>
+        <a:font script="Hebr" typeface="Times New Roman"/>
+        <a:font script="Thai" typeface="Angsana New"/>
+        <a:font script="Ethi" typeface="Nyala"/>
+        <a:font script="Beng" typeface="Vrinda"/>
+        <a:font script="Gujr" typeface="Shruti"/>
+        <a:font script="Khmr" typeface="MoolBoran"/>
+        <a:font script="Knda" typeface="Tunga"/>
+        <a:font script="Guru" typeface="Raavi"/>
+        <a:font script="Cans" typeface="Euphemia"/>
+        <a:font script="Cher" typeface="Plantagenet Cherokee"/>
+        <a:font script="Yiii" typeface="Microsoft Yi Baiti"/>
+        <a:font script="Tibt" typeface="Microsoft Himalaya"/>
+        <a:font script="Thaa" typeface="MV Boli"/>
+        <a:font script="Deva" typeface="Mangal"/>
+        <a:font script="Telu" typeface="Gautami"/>
+        <a:font script="Taml" typeface="Latha"/>
+        <a:font script="Syrc" typeface="Estrangelo Edessa"/>
+        <a:font script="Orya" typeface="Kalinga"/>
+        <a:font script="Mlym" typeface="Kartika"/>
+        <a:font script="Laoo" typeface="DokChampa"/>
+        <a:font script="Sinh" typeface="Iskoola Pota"/>
+        <a:font script="Mong" typeface="Mongolian Baiti"/>
+        <a:font script="Viet" typeface="Times New Roman"/>
+        <a:font script="Uigh" typeface="Microsoft Uighur"/>
+        <a:font script="Geor" typeface="Sylfaen"/>
       </a:majorFont>
       <a:minorFont>
-        <a:latin typeface="Segoe UI"/>
+        <a:latin typeface="Calibri"/>
         <a:ea typeface=""/>
         <a:cs typeface=""/>
+        <a:font script="Jpan" typeface="ＭＳ Ｐゴシック"/>
+        <a:font script="Hang" typeface="맑은 고딕"/>
+        <a:font script="Hans" typeface="宋体"/>
+        <a:font script="Hant" typeface="新細明體"/>
+        <a:font script="Arab" typeface="Arial"/>
+        <a:font script="Hebr" typeface="Arial"/>
+        <a:font script="Thai" typeface="Cordia New"/>
+        <a:font script="Ethi" typeface="Nyala"/>
+        <a:font script="Beng" typeface="Vrinda"/>
+        <a:font script="Gujr" typeface="Shruti"/>
+        <a:font script="Khmr" typeface="DaunPenh"/>
+        <a:font script="Knda" typeface="Tunga"/>
+        <a:font script="Guru" typeface="Raavi"/>
+        <a:font script="Cans" typeface="Euphemia"/>
+        <a:font script="Cher" typeface="Plantagenet Cherokee"/>
+        <a:font script="Yiii" typeface="Microsoft Yi Baiti"/>
+        <a:font script="Tibt" typeface="Microsoft Himalaya"/>
+        <a:font script="Thaa" typeface="MV Boli"/>
+        <a:font script="Deva" typeface="Mangal"/>
+        <a:font script="Telu" typeface="Gautami"/>
+        <a:font script="Taml" typeface="Latha"/>
+        <a:font script="Syrc" typeface="Estrangelo Edessa"/>
+        <a:font script="Orya" typeface="Kalinga"/>
+        <a:font script="Mlym" typeface="Kartika"/>
+        <a:font script="Laoo" typeface="DokChampa"/>
+        <a:font script="Sinh" typeface="Iskoola Pota"/>
+        <a:font script="Mong" typeface="Mongolian Baiti"/>
+        <a:font script="Viet" typeface="Arial"/>
+        <a:font script="Uigh" typeface="Microsoft Uighur"/>
+        <a:font script="Geor" typeface="Sylfaen"/>
       </a:minorFont>
     </a:fontScheme>
-    <a:fmtScheme name="Tessera">
+    <a:fmtScheme name="Office">
       <a:fillStyleLst>
         <a:solidFill>
           <a:schemeClr val="phClr"/>
         </a:solidFill>
-        <a:solidFill>
-          <a:schemeClr val="phClr"/>
-        </a:solidFill>
-        <a:solidFill>
-          <a:schemeClr val="phClr"/>
-        </a:solidFill>
+        <a:gradFill rotWithShape="1">
+          <a:gsLst>
+            <a:gs pos="0">
+              <a:schemeClr val="phClr">
+                <a:tint val="50000"/>
+                <a:satMod val="300000"/>
+              </a:schemeClr>
+            </a:gs>
+            <a:gs pos="35000">
+              <a:schemeClr val="phClr">
+                <a:tint val="37000"/>
+                <a:satMod val="300000"/>
+              </a:schemeClr>
+            </a:gs>
+            <a:gs pos="100000">
+              <a:schemeClr val="phClr">
+                <a:tint val="15000"/>
+                <a:satMod val="350000"/>
+              </a:schemeClr>
+            </a:gs>
+          </a:gsLst>
+          <a:lin ang="16200000" scaled="1"/>
+        </a:gradFill>
+        <a:gradFill rotWithShape="1">
+          <a:gsLst>
+            <a:gs pos="0">
+              <a:schemeClr val="phClr">
+                <a:tint val="100000"/>
+                <a:shade val="100000"/>
+                <a:satMod val="130000"/>
+              </a:schemeClr>
+            </a:gs>
+            <a:gs pos="100000">
+              <a:schemeClr val="phClr">
+                <a:tint val="50000"/>
+                <a:shade val="100000"/>
+                <a:satMod val="350000"/>
+              </a:schemeClr>
+            </a:gs>
+          </a:gsLst>
+          <a:lin ang="16200000" scaled="0"/>
+        </a:gradFill>
       </a:fillStyleLst>
       <a:lnStyleLst>
-        <a:ln w="9525">
+        <a:ln w="9525" cap="flat" cmpd="sng" algn="ctr">
+          <a:solidFill>
+            <a:schemeClr val="phClr">
+              <a:shade val="95000"/>
+              <a:satMod val="105000"/>
+            </a:schemeClr>
+          </a:solidFill>
+          <a:prstDash val="solid"/>
+        </a:ln>
+        <a:ln w="25400" cap="flat" cmpd="sng" algn="ctr">
           <a:solidFill>
             <a:schemeClr val="phClr"/>
           </a:solidFill>
+          <a:prstDash val="solid"/>
         </a:ln>
-        <a:ln w="12700">
+        <a:ln w="38100" cap="flat" cmpd="sng" algn="ctr">
           <a:solidFill>
             <a:schemeClr val="phClr"/>
           </a:solidFill>
-        </a:ln>
-        <a:ln w="19050">
-          <a:solidFill>
-            <a:schemeClr val="phClr"/>
-          </a:solidFill>
+          <a:prstDash val="solid"/>
         </a:ln>
       </a:lnStyleLst>
       <a:effectStyleLst>
         <a:effectStyle>
-          <a:effectLst/>
+          <a:effectLst>
+            <a:outerShdw blurRad="40000" dist="20000" dir="5400000" rotWithShape="0">
+              <a:srgbClr val="000000">
+                <a:alpha val="38000"/>
+              </a:srgbClr>
+            </a:outerShdw>
+          </a:effectLst>
         </a:effectStyle>
         <a:effectStyle>
-          <a:effectLst/>
+          <a:effectLst>
+            <a:outerShdw blurRad="40000" dist="23000" dir="5400000" rotWithShape="0">
+              <a:srgbClr val="000000">
+                <a:alpha val="35000"/>
+              </a:srgbClr>
+            </a:outerShdw>
+          </a:effectLst>
         </a:effectStyle>
         <a:effectStyle>
-          <a:effectLst/>
+          <a:effectLst>
+            <a:outerShdw blurRad="40000" dist="23000" dir="5400000" rotWithShape="0">
+              <a:srgbClr val="000000">
+                <a:alpha val="35000"/>
+              </a:srgbClr>
+            </a:outerShdw>
+          </a:effectLst>
+          <a:scene3d>
+            <a:camera prst="orthographicFront">
+              <a:rot lat="0" lon="0" rev="0"/>
+            </a:camera>
+            <a:lightRig rig="threePt" dir="t">
+              <a:rot lat="0" lon="0" rev="1200000"/>
+            </a:lightRig>
+          </a:scene3d>
+          <a:sp3d>
+            <a:bevelT w="63500" h="25400"/>
+          </a:sp3d>
         </a:effectStyle>
       </a:effectStyleLst>
       <a:bgFillStyleLst>
         <a:solidFill>
           <a:schemeClr val="phClr"/>
         </a:solidFill>
+        <a:gradFill rotWithShape="1">
+          <a:gsLst>
+            <a:gs pos="0">
+              <a:schemeClr val="phClr">
+                <a:tint val="40000"/>
+                <a:satMod val="350000"/>
+              </a:schemeClr>
+            </a:gs>
+            <a:gs pos="40000">
+              <a:schemeClr val="phClr">
+                <a:tint val="45000"/>
+                <a:shade val="99000"/>
+                <a:satMod val="350000"/>
+              </a:schemeClr>
+            </a:gs>
+            <a:gs pos="100000">
+              <a:schemeClr val="phClr">
+                <a:shade val="20000"/>
+                <a:satMod val="255000"/>
+              </a:schemeClr>
+            </a:gs>
+          </a:gsLst>
+          <a:path path="circle">
+            <a:fillToRect l="50000" t="-80000" r="50000" b="180000"/>
+          </a:path>
+        </a:gradFill>
+        <a:gradFill rotWithShape="1">
+          <a:gsLst>
+            <a:gs pos="0">
+              <a:schemeClr val="phClr">
+                <a:tint val="80000"/>
+                <a:satMod val="300000"/>
+              </a:schemeClr>
+            </a:gs>
+            <a:gs pos="100000">
+              <a:schemeClr val="phClr">
+                <a:shade val="30000"/>
+                <a:satMod val="200000"/>
+              </a:schemeClr>
+            </a:gs>
+          </a:gsLst>
+          <a:path path="circle">
+            <a:fillToRect l="50000" t="50000" r="50000" b="50000"/>
+          </a:path>
+        </a:gradFill>
+      </a:bgFillStyleLst>
+    </a:fmtScheme>
+  </a:themeElements>
+  <a:objectDefaults>
+    <a:spDef>
+      <a:spPr/>
+      <a:bodyPr/>
+      <a:lstStyle/>
+      <a:style>
+        <a:lnRef idx="1">
+          <a:schemeClr val="accent1"/>
+        </a:lnRef>
+        <a:fillRef idx="3">
+          <a:schemeClr val="accent1"/>
+        </a:fillRef>
+        <a:effectRef idx="2">
+          <a:schemeClr val="accent1"/>
+        </a:effectRef>
+        <a:fontRef idx="minor">
+          <a:schemeClr val="lt1"/>
+        </a:fontRef>
+      </a:style>
+    </a:spDef>
+    <a:lnDef>
+      <a:spPr/>
+      <a:bodyPr/>
+      <a:lstStyle/>
+      <a:style>
+        <a:lnRef idx="2">
+          <a:schemeClr val="accent1"/>
+        </a:lnRef>
+        <a:fillRef idx="0">
+          <a:schemeClr val="accent1"/>
+        </a:fillRef>
+        <a:effectRef idx="1">
+          <a:schemeClr val="accent1"/>
+        </a:effectRef>
+        <a:fontRef idx="minor">
+          <a:schemeClr val="tx1"/>
+        </a:fontRef>
+      </a:style>
+    </a:lnDef>
+  </a:objectDefaults>
+  <a:extraClrSchemeLst/>
+</a:theme>
+</file>
+
+<file path=ppt/theme/theme2.xml><?xml version="1.0" encoding="utf-8"?>
+<a:theme xmlns:a="http://schemas.openxmlformats.org/drawingml/2006/main" name="Office Theme">
+  <a:themeElements>
+    <a:clrScheme name="Office">
+      <a:dk1>
+        <a:sysClr val="windowText" lastClr="000000"/>
+      </a:dk1>
+      <a:lt1>
+        <a:sysClr val="window" lastClr="FFFFFF"/>
+      </a:lt1>
+      <a:dk2>
+        <a:srgbClr val="1F497D"/>
+      </a:dk2>
+      <a:lt2>
+        <a:srgbClr val="EEECE1"/>
+      </a:lt2>
+      <a:accent1>
+        <a:srgbClr val="4F81BD"/>
+      </a:accent1>
+      <a:accent2>
+        <a:srgbClr val="C0504D"/>
+      </a:accent2>
+      <a:accent3>
+        <a:srgbClr val="9BBB59"/>
+      </a:accent3>
+      <a:accent4>
+        <a:srgbClr val="8064A2"/>
+      </a:accent4>
+      <a:accent5>
+        <a:srgbClr val="4BACC6"/>
+      </a:accent5>
+      <a:accent6>
+        <a:srgbClr val="F79646"/>
+      </a:accent6>
+      <a:hlink>
+        <a:srgbClr val="0000FF"/>
+      </a:hlink>
+      <a:folHlink>
+        <a:srgbClr val="800080"/>
+      </a:folHlink>
+    </a:clrScheme>
+    <a:fontScheme name="Office">
+      <a:majorFont>
+        <a:latin typeface="Calibri"/>
+        <a:ea typeface=""/>
+        <a:cs typeface=""/>
+        <a:font script="Jpan" typeface="ＭＳ Ｐゴシック"/>
+        <a:font script="Hang" typeface="맑은 고딕"/>
+        <a:font script="Hans" typeface="宋体"/>
+        <a:font script="Hant" typeface="新細明體"/>
+        <a:font script="Arab" typeface="Times New Roman"/>
+        <a:font script="Hebr" typeface="Times New Roman"/>
+        <a:font script="Thai" typeface="Angsana New"/>
+        <a:font script="Ethi" typeface="Nyala"/>
+        <a:font script="Beng" typeface="Vrinda"/>
+        <a:font script="Gujr" typeface="Shruti"/>
+        <a:font script="Khmr" typeface="MoolBoran"/>
+        <a:font script="Knda" typeface="Tunga"/>
+        <a:font script="Guru" typeface="Raavi"/>
+        <a:font script="Cans" typeface="Euphemia"/>
+        <a:font script="Cher" typeface="Plantagenet Cherokee"/>
+        <a:font script="Yiii" typeface="Microsoft Yi Baiti"/>
+        <a:font script="Tibt" typeface="Microsoft Himalaya"/>
+        <a:font script="Thaa" typeface="MV Boli"/>
+        <a:font script="Deva" typeface="Mangal"/>
+        <a:font script="Telu" typeface="Gautami"/>
+        <a:font script="Taml" typeface="Latha"/>
+        <a:font script="Syrc" typeface="Estrangelo Edessa"/>
+        <a:font script="Orya" typeface="Kalinga"/>
+        <a:font script="Mlym" typeface="Kartika"/>
+        <a:font script="Laoo" typeface="DokChampa"/>
+        <a:font script="Sinh" typeface="Iskoola Pota"/>
+        <a:font script="Mong" typeface="Mongolian Baiti"/>
+        <a:font script="Viet" typeface="Times New Roman"/>
+        <a:font script="Uigh" typeface="Microsoft Uighur"/>
+        <a:font script="Geor" typeface="Sylfaen"/>
+      </a:majorFont>
+      <a:minorFont>
+        <a:latin typeface="Calibri"/>
+        <a:ea typeface=""/>
+        <a:cs typeface=""/>
+        <a:font script="Jpan" typeface="ＭＳ Ｐゴシック"/>
+        <a:font script="Hang" typeface="맑은 고딕"/>
+        <a:font script="Hans" typeface="宋体"/>
+        <a:font script="Hant" typeface="新細明體"/>
+        <a:font script="Arab" typeface="Arial"/>
+        <a:font script="Hebr" typeface="Arial"/>
+        <a:font script="Thai" typeface="Cordia New"/>
+        <a:font script="Ethi" typeface="Nyala"/>
+        <a:font script="Beng" typeface="Vrinda"/>
+        <a:font script="Gujr" typeface="Shruti"/>
+        <a:font script="Khmr" typeface="DaunPenh"/>
+        <a:font script="Knda" typeface="Tunga"/>
+        <a:font script="Guru" typeface="Raavi"/>
+        <a:font script="Cans" typeface="Euphemia"/>
+        <a:font script="Cher" typeface="Plantagenet Cherokee"/>
+        <a:font script="Yiii" typeface="Microsoft Yi Baiti"/>
+        <a:font script="Tibt" typeface="Microsoft Himalaya"/>
+        <a:font script="Thaa" typeface="MV Boli"/>
+        <a:font script="Deva" typeface="Mangal"/>
+        <a:font script="Telu" typeface="Gautami"/>
+        <a:font script="Taml" typeface="Latha"/>
+        <a:font script="Syrc" typeface="Estrangelo Edessa"/>
+        <a:font script="Orya" typeface="Kalinga"/>
+        <a:font script="Mlym" typeface="Kartika"/>
+        <a:font script="Laoo" typeface="DokChampa"/>
+        <a:font script="Sinh" typeface="Iskoola Pota"/>
+        <a:font script="Mong" typeface="Mongolian Baiti"/>
+        <a:font script="Viet" typeface="Arial"/>
+        <a:font script="Uigh" typeface="Microsoft Uighur"/>
+        <a:font script="Geor" typeface="Sylfaen"/>
+      </a:minorFont>
+    </a:fontScheme>
+    <a:fmtScheme name="Office">
+      <a:fillStyleLst>
         <a:solidFill>
           <a:schemeClr val="phClr"/>
         </a:solidFill>
+        <a:gradFill rotWithShape="1">
+          <a:gsLst>
+            <a:gs pos="0">
+              <a:schemeClr val="phClr">
+                <a:tint val="50000"/>
+                <a:satMod val="300000"/>
+              </a:schemeClr>
+            </a:gs>
+            <a:gs pos="35000">
+              <a:schemeClr val="phClr">
+                <a:tint val="37000"/>
+                <a:satMod val="300000"/>
+              </a:schemeClr>
+            </a:gs>
+            <a:gs pos="100000">
+              <a:schemeClr val="phClr">
+                <a:tint val="15000"/>
+                <a:satMod val="350000"/>
+              </a:schemeClr>
+            </a:gs>
+          </a:gsLst>
+          <a:lin ang="16200000" scaled="1"/>
+        </a:gradFill>
+        <a:gradFill rotWithShape="1">
+          <a:gsLst>
+            <a:gs pos="0">
+              <a:schemeClr val="phClr">
+                <a:tint val="100000"/>
+                <a:shade val="100000"/>
+                <a:satMod val="130000"/>
+              </a:schemeClr>
+            </a:gs>
+            <a:gs pos="100000">
+              <a:schemeClr val="phClr">
+                <a:tint val="50000"/>
+                <a:shade val="100000"/>
+                <a:satMod val="350000"/>
+              </a:schemeClr>
+            </a:gs>
+          </a:gsLst>
+          <a:lin ang="16200000" scaled="0"/>
+        </a:gradFill>
+      </a:fillStyleLst>
+      <a:lnStyleLst>
+        <a:ln w="9525" cap="flat" cmpd="sng" algn="ctr">
+          <a:solidFill>
+            <a:schemeClr val="phClr">
+              <a:shade val="95000"/>
+              <a:satMod val="105000"/>
+            </a:schemeClr>
+          </a:solidFill>
+          <a:prstDash val="solid"/>
+        </a:ln>
+        <a:ln w="25400" cap="flat" cmpd="sng" algn="ctr">
+          <a:solidFill>
+            <a:schemeClr val="phClr"/>
+          </a:solidFill>
+          <a:prstDash val="solid"/>
+        </a:ln>
+        <a:ln w="38100" cap="flat" cmpd="sng" algn="ctr">
+          <a:solidFill>
+            <a:schemeClr val="phClr"/>
+          </a:solidFill>
+          <a:prstDash val="solid"/>
+        </a:ln>
+      </a:lnStyleLst>
+      <a:effectStyleLst>
+        <a:effectStyle>
+          <a:effectLst>
+            <a:outerShdw blurRad="40000" dist="20000" dir="5400000" rotWithShape="0">
+              <a:srgbClr val="000000">
+                <a:alpha val="38000"/>
+              </a:srgbClr>
+            </a:outerShdw>
+          </a:effectLst>
+        </a:effectStyle>
+        <a:effectStyle>
+          <a:effectLst>
+            <a:outerShdw blurRad="40000" dist="23000" dir="5400000" rotWithShape="0">
+              <a:srgbClr val="000000">
+                <a:alpha val="35000"/>
+              </a:srgbClr>
+            </a:outerShdw>
+          </a:effectLst>
+        </a:effectStyle>
+        <a:effectStyle>
+          <a:effectLst>
+            <a:outerShdw blurRad="40000" dist="23000" dir="5400000" rotWithShape="0">
+              <a:srgbClr val="000000">
+                <a:alpha val="35000"/>
+              </a:srgbClr>
+            </a:outerShdw>
+          </a:effectLst>
+          <a:scene3d>
+            <a:camera prst="orthographicFront">
+              <a:rot lat="0" lon="0" rev="0"/>
+            </a:camera>
+            <a:lightRig rig="threePt" dir="t">
+              <a:rot lat="0" lon="0" rev="1200000"/>
+            </a:lightRig>
+          </a:scene3d>
+          <a:sp3d>
+            <a:bevelT w="63500" h="25400"/>
+          </a:sp3d>
+        </a:effectStyle>
+      </a:effectStyleLst>
+      <a:bgFillStyleLst>
         <a:solidFill>
           <a:schemeClr val="phClr"/>
         </a:solidFill>
+        <a:gradFill rotWithShape="1">
+          <a:gsLst>
+            <a:gs pos="0">
+              <a:schemeClr val="phClr">
+                <a:tint val="40000"/>
+                <a:satMod val="350000"/>
+              </a:schemeClr>
+            </a:gs>
+            <a:gs pos="40000">
+              <a:schemeClr val="phClr">
+                <a:tint val="45000"/>
+                <a:shade val="99000"/>
+                <a:satMod val="350000"/>
+              </a:schemeClr>
+            </a:gs>
+            <a:gs pos="100000">
+              <a:schemeClr val="phClr">
+                <a:shade val="20000"/>
+                <a:satMod val="255000"/>
+              </a:schemeClr>
+            </a:gs>
+          </a:gsLst>
+          <a:path path="circle">
+            <a:fillToRect l="50000" t="-80000" r="50000" b="180000"/>
+          </a:path>
+        </a:gradFill>
+        <a:gradFill rotWithShape="1">
+          <a:gsLst>
+            <a:gs pos="0">
+              <a:schemeClr val="phClr">
+                <a:tint val="80000"/>
+                <a:satMod val="300000"/>
+              </a:schemeClr>
+            </a:gs>
+            <a:gs pos="100000">
+              <a:schemeClr val="phClr">
+                <a:shade val="30000"/>
+                <a:satMod val="200000"/>
+              </a:schemeClr>
+            </a:gs>
+          </a:gsLst>
+          <a:path path="circle">
+            <a:fillToRect l="50000" t="50000" r="50000" b="50000"/>
+          </a:path>
+        </a:gradFill>
       </a:bgFillStyleLst>
     </a:fmtScheme>
   </a:themeElements>
+  <a:objectDefaults>
+    <a:spDef>
+      <a:spPr/>
+      <a:bodyPr/>
+      <a:lstStyle/>
+      <a:style>
+        <a:lnRef idx="1">
+          <a:schemeClr val="accent1"/>
+        </a:lnRef>
+        <a:fillRef idx="3">
+          <a:schemeClr val="accent1"/>
+        </a:fillRef>
+        <a:effectRef idx="2">
+          <a:schemeClr val="accent1"/>
+        </a:effectRef>
+        <a:fontRef idx="minor">
+          <a:schemeClr val="lt1"/>
+        </a:fontRef>
+      </a:style>
+    </a:spDef>
+    <a:lnDef>
+      <a:spPr/>
+      <a:bodyPr/>
+      <a:lstStyle/>
+      <a:style>
+        <a:lnRef idx="2">
+          <a:schemeClr val="accent1"/>
+        </a:lnRef>
+        <a:fillRef idx="0">
+          <a:schemeClr val="accent1"/>
+        </a:fillRef>
+        <a:effectRef idx="1">
+          <a:schemeClr val="accent1"/>
+        </a:effectRef>
+        <a:fontRef idx="minor">
+          <a:schemeClr val="tx1"/>
+        </a:fontRef>
+      </a:style>
+    </a:lnDef>
+  </a:objectDefaults>
+  <a:extraClrSchemeLst/>
 </a:theme>
 </file>
--- a/docs/deck.pptx
+++ b/docs/deck.pptx
@@ -2902,7 +2902,7 @@
                 </a:solidFill>
                 <a:latin typeface="Segoe UI" pitchFamily="34" charset="0"/>
               </a:rPr>
-              <a:t>225 automated tests</a:t>
+              <a:t>238 automated tests</a:t>
             </a:r>
           </a:p>
           <a:p>
@@ -2922,7 +2922,7 @@
                 </a:solidFill>
                 <a:latin typeface="Segoe UI" pitchFamily="34" charset="0"/>
               </a:rPr>
-              <a:t>104 contract · 121 agent · CI on every push</a:t>
+              <a:t>104 contract · 134 agent · CI on every push</a:t>
             </a:r>
           </a:p>
         </p:txBody>
@@ -6077,7 +6077,7 @@
                 </a:solidFill>
                 <a:latin typeface="Segoe UI" pitchFamily="34" charset="0"/>
               </a:rPr>
-              <a:t>225</a:t>
+              <a:t>238</a:t>
             </a:r>
           </a:p>
         </p:txBody>
@@ -6137,7 +6137,7 @@
                 </a:solidFill>
                 <a:latin typeface="Segoe UI" pitchFamily="34" charset="0"/>
               </a:rPr>
-              <a:t>104 contract · 121 agent</a:t>
+              <a:t>104 contract · 134 agent</a:t>
             </a:r>
           </a:p>
         </p:txBody>
@@ -14521,7 +14521,7 @@
         </p:nvSpPr>
         <p:spPr>
           <a:xfrm>
-            <a:off x="800100" y="1673066"/>
+            <a:off x="800100" y="1425416"/>
             <a:ext cx="381000" cy="23813"/>
           </a:xfrm>
           <a:prstGeom prst="roundRect">
@@ -14550,7 +14550,7 @@
         </p:nvSpPr>
         <p:spPr>
           <a:xfrm>
-            <a:off x="1295400" y="1608773"/>
+            <a:off x="1295400" y="1361123"/>
             <a:ext cx="10096500" cy="214313"/>
           </a:xfrm>
           <a:prstGeom prst="rect">
@@ -14587,7 +14587,7 @@
         </p:nvSpPr>
         <p:spPr>
           <a:xfrm>
-            <a:off x="800100" y="1894523"/>
+            <a:off x="800100" y="1646873"/>
             <a:ext cx="10591800" cy="590550"/>
           </a:xfrm>
           <a:prstGeom prst="rect">
@@ -14627,8 +14627,8 @@
         </p:nvSpPr>
         <p:spPr>
           <a:xfrm>
-            <a:off x="800100" y="2561273"/>
-            <a:ext cx="8261604" cy="723900"/>
+            <a:off x="800100" y="2313623"/>
+            <a:ext cx="8261604" cy="1038225"/>
           </a:xfrm>
           <a:prstGeom prst="rect">
             <a:avLst/>
@@ -14654,7 +14654,7 @@
                 </a:solidFill>
                 <a:latin typeface="Segoe UI" pitchFamily="34" charset="0"/>
               </a:rPr>
-              <a:t>News across 21 topics, FX, crypto, stocks, indices, commodities, and market analysis derived from those prices.</a:t>
+              <a:t>News across 21 topics, 46 FX pairs, 52 crypto assets, 36 stocks, 16 indices, 18 commodities, central bank policy rates and balance sheets — plus analysis derived from those figures.</a:t>
             </a:r>
           </a:p>
         </p:txBody>
@@ -14667,7 +14667,7 @@
         </p:nvSpPr>
         <p:spPr>
           <a:xfrm>
-            <a:off x="800100" y="3456623"/>
+            <a:off x="800100" y="3523298"/>
             <a:ext cx="5219700" cy="991553"/>
           </a:xfrm>
           <a:prstGeom prst="roundRect">
@@ -14698,7 +14698,7 @@
         </p:nvSpPr>
         <p:spPr>
           <a:xfrm>
-            <a:off x="971550" y="3628073"/>
+            <a:off x="971550" y="3694748"/>
             <a:ext cx="4876800" cy="648653"/>
           </a:xfrm>
           <a:prstGeom prst="rect">
@@ -14745,7 +14745,7 @@
                 </a:solidFill>
                 <a:latin typeface="Segoe UI" pitchFamily="34" charset="0"/>
               </a:rPr>
-              <a:t>ECB reference rates, CoinGecko, Yahoo Finance, public RSS. Each panel names its source and its age.</a:t>
+              <a:t>ECB reference rates, CoinGecko, Yahoo Finance, FRED (St. Louis Fed), public RSS. Each panel names its source and its age.</a:t>
             </a:r>
           </a:p>
         </p:txBody>
@@ -14758,7 +14758,7 @@
         </p:nvSpPr>
         <p:spPr>
           <a:xfrm>
-            <a:off x="6172200" y="3456623"/>
+            <a:off x="6172200" y="3523298"/>
             <a:ext cx="5219700" cy="991553"/>
           </a:xfrm>
           <a:prstGeom prst="roundRect">
@@ -14789,7 +14789,7 @@
         </p:nvSpPr>
         <p:spPr>
           <a:xfrm>
-            <a:off x="6343650" y="3628073"/>
+            <a:off x="6343650" y="3694748"/>
             <a:ext cx="4876800" cy="648653"/>
           </a:xfrm>
           <a:prstGeom prst="rect">
@@ -14849,12 +14849,12 @@
         </p:nvSpPr>
         <p:spPr>
           <a:xfrm>
-            <a:off x="800100" y="4600575"/>
-            <a:ext cx="5219700" cy="991553"/>
-          </a:xfrm>
-          <a:prstGeom prst="roundRect">
-            <a:avLst>
-              <a:gd name="adj" fmla="val 13449"/>
+            <a:off x="800100" y="4667250"/>
+            <a:ext cx="5219700" cy="1172528"/>
+          </a:xfrm>
+          <a:prstGeom prst="roundRect">
+            <a:avLst>
+              <a:gd name="adj" fmla="val 11373"/>
             </a:avLst>
           </a:prstGeom>
           <a:solidFill>
@@ -14880,8 +14880,8 @@
         </p:nvSpPr>
         <p:spPr>
           <a:xfrm>
-            <a:off x="971550" y="4772025"/>
-            <a:ext cx="4876800" cy="648653"/>
+            <a:off x="971550" y="4838700"/>
+            <a:ext cx="4876800" cy="829628"/>
           </a:xfrm>
           <a:prstGeom prst="rect">
             <a:avLst/>
@@ -14927,7 +14927,7 @@
                 </a:solidFill>
                 <a:latin typeface="Segoe UI" pitchFamily="34" charset="0"/>
               </a:rPr>
-              <a:t>Breadth, leaders, laggards, volatility, dollar direction — arithmetic on the prices shown, no forecasts.</a:t>
+              <a:t>Breadth, volatility, dollar direction, policy rates, QE/QT — arithmetic on published figures. A rate change is dated by finding where the series moved, not by reading a statement.</a:t>
             </a:r>
           </a:p>
         </p:txBody>
@@ -14940,12 +14940,12 @@
         </p:nvSpPr>
         <p:spPr>
           <a:xfrm>
-            <a:off x="6172200" y="4600575"/>
-            <a:ext cx="5219700" cy="991553"/>
-          </a:xfrm>
-          <a:prstGeom prst="roundRect">
-            <a:avLst>
-              <a:gd name="adj" fmla="val 13449"/>
+            <a:off x="6172200" y="4667250"/>
+            <a:ext cx="5219700" cy="1172528"/>
+          </a:xfrm>
+          <a:prstGeom prst="roundRect">
+            <a:avLst>
+              <a:gd name="adj" fmla="val 11373"/>
             </a:avLst>
           </a:prstGeom>
           <a:solidFill>
@@ -14971,8 +14971,8 @@
         </p:nvSpPr>
         <p:spPr>
           <a:xfrm>
-            <a:off x="6343650" y="4772025"/>
-            <a:ext cx="4876800" cy="648653"/>
+            <a:off x="6343650" y="4838700"/>
+            <a:ext cx="4876800" cy="829628"/>
           </a:xfrm>
           <a:prstGeom prst="rect">
             <a:avLst/>

--- a/docs/deck.pptx
+++ b/docs/deck.pptx
@@ -2802,7 +2802,7 @@
                 </a:solidFill>
                 <a:latin typeface="Segoe UI" pitchFamily="34" charset="0"/>
               </a:rPr>
-              <a:t>escrow, tabs, pool, vault, swap, AMM, 2 collectors</a:t>
+              <a:t>escrow, tabs, pool, vault, router, AMM, 2 collectors</a:t>
             </a:r>
           </a:p>
         </p:txBody>
@@ -12520,7 +12520,7 @@
                 </a:solidFill>
                 <a:latin typeface="Segoe UI" pitchFamily="34" charset="0"/>
               </a:rPr>
-              <a:t>◆ Swap desk</a:t>
+              <a:t>◆ Swap</a:t>
             </a:r>
           </a:p>
           <a:p>
@@ -12540,7 +12540,7 @@
                 </a:solidFill>
                 <a:latin typeface="Segoe UI" pitchFamily="34" charset="0"/>
               </a:rPr>
-              <a:t>Oracle-priced swaps between pool assets, with a configurable fee split.</a:t>
+              <a:t>Routed through AMM pool liquidity — up to two hops, min-out and a deadline. No inventory, no oracle in the path.</a:t>
             </a:r>
           </a:p>
         </p:txBody>
